--- a/assets/ppts/M3.6_Connecting_Devices.pptx
+++ b/assets/ppts/M3.6_Connecting_Devices.pptx
@@ -8,6 +8,7 @@
     <p:sldId id="256" r:id="rId7"/>
     <p:sldId id="257" r:id="rId8"/>
     <p:sldId id="258" r:id="rId9"/>
+    <p:sldId id="259" r:id="rId10"/>
   </p:sldIdLst>
   <p:sldSz cx="12191695" cy="6858000" type="screen4x3"/>
   <p:notesSz cx="6858000" cy="9144000"/>
@@ -3141,8 +3142,8 @@
         </p:nvSpPr>
         <p:spPr>
           <a:xfrm>
-            <a:off x="822960" y="1188720"/>
-            <a:ext cx="164592" cy="4480560"/>
+            <a:off x="0" y="0"/>
+            <a:ext cx="12191695" cy="137160"/>
           </a:xfrm>
           <a:prstGeom prst="rect">
             <a:avLst/>
@@ -3178,14 +3179,57 @@
       </p:sp>
       <p:sp>
         <p:nvSpPr>
-          <p:cNvPr id="4" name="TextBox 3"/>
+          <p:cNvPr id="4" name="Rectangle 3"/>
+          <p:cNvSpPr/>
+          <p:nvPr/>
+        </p:nvSpPr>
+        <p:spPr>
+          <a:xfrm>
+            <a:off x="822960" y="1097280"/>
+            <a:ext cx="164592" cy="4663440"/>
+          </a:xfrm>
+          <a:prstGeom prst="rect">
+            <a:avLst/>
+          </a:prstGeom>
+          <a:solidFill>
+            <a:srgbClr val="D97706"/>
+          </a:solidFill>
+          <a:ln>
+            <a:noFill/>
+          </a:ln>
+        </p:spPr>
+        <p:style>
+          <a:lnRef idx="1">
+            <a:schemeClr val="accent1"/>
+          </a:lnRef>
+          <a:fillRef idx="3">
+            <a:schemeClr val="accent1"/>
+          </a:fillRef>
+          <a:effectRef idx="2">
+            <a:schemeClr val="accent1"/>
+          </a:effectRef>
+          <a:fontRef idx="minor">
+            <a:schemeClr val="lt1"/>
+          </a:fontRef>
+        </p:style>
+        <p:txBody>
+          <a:bodyPr rtlCol="0" anchor="ctr"/>
+          <a:lstStyle/>
+          <a:p>
+            <a:pPr algn="ctr"/>
+          </a:p>
+        </p:txBody>
+      </p:sp>
+      <p:sp>
+        <p:nvSpPr>
+          <p:cNvPr id="5" name="TextBox 4"/>
           <p:cNvSpPr txBox="1"/>
           <p:nvPr/>
         </p:nvSpPr>
         <p:spPr>
           <a:xfrm>
-            <a:off x="1280160" y="1097280"/>
-            <a:ext cx="10058400" cy="4663440"/>
+            <a:off x="1234440" y="1005840"/>
+            <a:ext cx="10241280" cy="4846320"/>
           </a:xfrm>
           <a:prstGeom prst="rect">
             <a:avLst/>
@@ -3200,70 +3244,165 @@
           <a:p>
             <a:pPr>
               <a:spcAft>
+                <a:spcPts val="1000"/>
+              </a:spcAft>
+              <a:defRPr b="1" sz="1300">
+                <a:solidFill>
+                  <a:srgbClr val="D97706"/>
+                </a:solidFill>
+              </a:defRPr>
+            </a:pPr>
+            <a:r>
+              <a:t>PCCST501 Computer Networks | KTU 2024 Scheme • MODULE 3 • M3.6</a:t>
+            </a:r>
+          </a:p>
+          <a:p>
+            <a:pPr>
+              <a:spcAft>
                 <a:spcPts val="1200"/>
               </a:spcAft>
-              <a:defRPr b="1" sz="1300">
-                <a:solidFill>
-                  <a:srgbClr val="D97706"/>
-                </a:solidFill>
-              </a:defRPr>
-            </a:pPr>
-            <a:r>
-              <a:t>PCCST501 Computer Networks | KTU 2024 Scheme • MODULE 3 • M3.6</a:t>
+              <a:defRPr b="1" sz="3000">
+                <a:solidFill>
+                  <a:srgbClr val="F8FAFC"/>
+                </a:solidFill>
+              </a:defRPr>
+            </a:pPr>
+            <a:r>
+              <a:t>Connecting Devices &amp; Spanning Tree Protocol (STP)</a:t>
             </a:r>
           </a:p>
           <a:p>
             <a:pPr>
               <a:spcAft>
-                <a:spcPts val="1400"/>
+                <a:spcPts val="2400"/>
               </a:spcAft>
-              <a:defRPr b="1" sz="3200">
-                <a:solidFill>
-                  <a:srgbClr val="F8FAFC"/>
-                </a:solidFill>
-              </a:defRPr>
-            </a:pPr>
-            <a:r>
-              <a:t>Connecting Devices &amp; Domain Segmentation</a:t>
+              <a:defRPr sz="1600">
+                <a:solidFill>
+                  <a:srgbClr val="94A3B8"/>
+                </a:solidFill>
+              </a:defRPr>
+            </a:pPr>
+            <a:r>
+              <a:t>Repeaters, Hubs (L1), Bridges &amp; Layer 2 Switches (MAC Learning), Spanning Tree Protocol (IEEE 802.1D STP), Routers &amp; Layer 3 Switches</a:t>
             </a:r>
           </a:p>
           <a:p>
             <a:pPr>
               <a:spcAft>
-                <a:spcPts val="2800"/>
+                <a:spcPts val="300"/>
               </a:spcAft>
-              <a:defRPr sz="1700">
+              <a:defRPr b="1" sz="1350">
+                <a:solidFill>
+                  <a:srgbClr val="E2E8F0"/>
+                </a:solidFill>
+              </a:defRPr>
+            </a:pPr>
+            <a:r>
+              <a:t>Prepared by: Prof. Anju Markose | Assistant Professor, Dept. of CSE | VJCET</a:t>
+            </a:r>
+          </a:p>
+          <a:p>
+            <a:pPr>
+              <a:defRPr sz="1150">
                 <a:solidFill>
                   <a:srgbClr val="94A3B8"/>
                 </a:solidFill>
               </a:defRPr>
             </a:pPr>
             <a:r>
-              <a:t>Repeaters, Hubs, Bridges, Layer 2 Learning Switches, Routers &amp; Collision vs Broadcast Domain Analysis</a:t>
-            </a:r>
-          </a:p>
+              <a:t>Viswajyothi College of Engineering and Technology (VJCET), Vazhakulam • KTU S5 CSE</a:t>
+            </a:r>
+          </a:p>
+        </p:txBody>
+      </p:sp>
+      <p:sp>
+        <p:nvSpPr>
+          <p:cNvPr id="6" name="Rounded Rectangle 5"/>
+          <p:cNvSpPr/>
+          <p:nvPr/>
+        </p:nvSpPr>
+        <p:spPr>
+          <a:xfrm>
+            <a:off x="8412480" y="5120640"/>
+            <a:ext cx="3017520" cy="822960"/>
+          </a:xfrm>
+          <a:prstGeom prst="roundRect">
+            <a:avLst/>
+          </a:prstGeom>
+          <a:solidFill>
+            <a:srgbClr val="1E293B"/>
+          </a:solidFill>
+          <a:ln w="12700">
+            <a:solidFill>
+              <a:srgbClr val="0E7490"/>
+            </a:solidFill>
+          </a:ln>
+        </p:spPr>
+        <p:style>
+          <a:lnRef idx="1">
+            <a:schemeClr val="accent1"/>
+          </a:lnRef>
+          <a:fillRef idx="3">
+            <a:schemeClr val="accent1"/>
+          </a:fillRef>
+          <a:effectRef idx="2">
+            <a:schemeClr val="accent1"/>
+          </a:effectRef>
+          <a:fontRef idx="minor">
+            <a:schemeClr val="lt1"/>
+          </a:fontRef>
+        </p:style>
+        <p:txBody>
+          <a:bodyPr rtlCol="0" anchor="ctr"/>
+          <a:lstStyle/>
+          <a:p>
+            <a:pPr algn="ctr"/>
+          </a:p>
+        </p:txBody>
+      </p:sp>
+      <p:sp>
+        <p:nvSpPr>
+          <p:cNvPr id="7" name="TextBox 6"/>
+          <p:cNvSpPr txBox="1"/>
+          <p:nvPr/>
+        </p:nvSpPr>
+        <p:spPr>
+          <a:xfrm>
+            <a:off x="8503920" y="5166360"/>
+            <a:ext cx="2834640" cy="731520"/>
+          </a:xfrm>
+          <a:prstGeom prst="rect">
+            <a:avLst/>
+          </a:prstGeom>
+          <a:noFill/>
+        </p:spPr>
+        <p:txBody>
+          <a:bodyPr wrap="none">
+            <a:spAutoFit/>
+          </a:bodyPr>
+          <a:lstStyle/>
           <a:p>
             <a:pPr>
-              <a:defRPr b="1" sz="1300">
-                <a:solidFill>
-                  <a:srgbClr val="E2E8F0"/>
-                </a:solidFill>
-              </a:defRPr>
-            </a:pPr>
-            <a:r>
-              <a:t>Prepared by: Prof. Anju Markose | Assistant Professor, Dept. of CSE | VJCET</a:t>
+              <a:defRPr b="1" sz="1050">
+                <a:solidFill>
+                  <a:srgbClr val="D97706"/>
+                </a:solidFill>
+              </a:defRPr>
+            </a:pPr>
+            <a:r>
+              <a:t>KTU B.Tech Curriculum</a:t>
             </a:r>
           </a:p>
           <a:p>
             <a:pPr>
-              <a:defRPr sz="1100">
-                <a:solidFill>
-                  <a:srgbClr val="94A3B8"/>
-                </a:solidFill>
-              </a:defRPr>
-            </a:pPr>
-            <a:r>
-              <a:t>Viswajyothi College of Engineering and Technology (VJCET), Vazhakulam</a:t>
+              <a:defRPr sz="950">
+                <a:solidFill>
+                  <a:srgbClr val="F8FAFC"/>
+                </a:solidFill>
+              </a:defRPr>
+            </a:pPr>
+            <a:r>
+              <a:t>Official Classroom Slide Deck</a:t>
             </a:r>
           </a:p>
         </p:txBody>
@@ -3395,14 +3534,14 @@
           <a:lstStyle/>
           <a:p>
             <a:pPr>
-              <a:defRPr b="1" sz="2300">
+              <a:defRPr b="1" sz="2200">
                 <a:solidFill>
                   <a:srgbClr val="F8FAFC"/>
                 </a:solidFill>
               </a:defRPr>
             </a:pPr>
             <a:r>
-              <a:t>3.6.1 Connecting Devices Classification</a:t>
+              <a:t>3.6.1 Connecting Devices Taxonomy &amp; Collision/Broadcast Domains</a:t>
             </a:r>
           </a:p>
         </p:txBody>
@@ -3444,167 +3583,24 @@
       </p:sp>
       <p:sp>
         <p:nvSpPr>
-          <p:cNvPr id="6" name="TextBox 5"/>
-          <p:cNvSpPr txBox="1"/>
-          <p:nvPr/>
-        </p:nvSpPr>
-        <p:spPr>
-          <a:xfrm>
-            <a:off x="731520" y="1280160"/>
-            <a:ext cx="6858000" cy="4937760"/>
-          </a:xfrm>
-          <a:prstGeom prst="rect">
-            <a:avLst/>
-          </a:prstGeom>
-          <a:noFill/>
-        </p:spPr>
-        <p:txBody>
-          <a:bodyPr wrap="square">
-            <a:spAutoFit/>
-          </a:bodyPr>
-          <a:lstStyle/>
-          <a:p>
-            <a:pPr>
-              <a:spcAft>
-                <a:spcPts val="200"/>
-              </a:spcAft>
-              <a:defRPr b="1" sz="1500">
-                <a:solidFill>
-                  <a:srgbClr val="0F1E4A"/>
-                </a:solidFill>
-              </a:defRPr>
-            </a:pPr>
-            <a:r>
-              <a:t>• Physical Layer (L1): Repeaters &amp; Hubs</a:t>
-            </a:r>
-          </a:p>
-          <a:p>
-            <a:pPr>
-              <a:spcAft>
-                <a:spcPts val="800"/>
-              </a:spcAft>
-              <a:defRPr sz="1300">
-                <a:solidFill>
-                  <a:srgbClr val="1E293B"/>
-                </a:solidFill>
-              </a:defRPr>
-            </a:pPr>
-            <a:r>
-              <a:t>   Regenerate/amplify electrical signals and broadcast bits to all ports. Single Collision Domain &amp; Single Broadcast Domain.</a:t>
-            </a:r>
-          </a:p>
-          <a:p>
-            <a:pPr>
-              <a:spcAft>
-                <a:spcPts val="200"/>
-              </a:spcAft>
-              <a:defRPr b="1" sz="1500">
-                <a:solidFill>
-                  <a:srgbClr val="0F1E4A"/>
-                </a:solidFill>
-              </a:defRPr>
-            </a:pPr>
-            <a:r>
-              <a:t>• Data Link Layer (L2): Bridges &amp; Switches</a:t>
-            </a:r>
-          </a:p>
-          <a:p>
-            <a:pPr>
-              <a:spcAft>
-                <a:spcPts val="800"/>
-              </a:spcAft>
-              <a:defRPr sz="1300">
-                <a:solidFill>
-                  <a:srgbClr val="1E293B"/>
-                </a:solidFill>
-              </a:defRPr>
-            </a:pPr>
-            <a:r>
-              <a:t>   Forward frames based on 48-bit MAC address tables. Break network into separate Collision Domains per port while maintaining a Single Broadcast Domain.</a:t>
-            </a:r>
-          </a:p>
-          <a:p>
-            <a:pPr>
-              <a:spcAft>
-                <a:spcPts val="200"/>
-              </a:spcAft>
-              <a:defRPr b="1" sz="1500">
-                <a:solidFill>
-                  <a:srgbClr val="0F1E4A"/>
-                </a:solidFill>
-              </a:defRPr>
-            </a:pPr>
-            <a:r>
-              <a:t>• Learning Switch Algorithm</a:t>
-            </a:r>
-          </a:p>
-          <a:p>
-            <a:pPr>
-              <a:spcAft>
-                <a:spcPts val="800"/>
-              </a:spcAft>
-              <a:defRPr sz="1300">
-                <a:solidFill>
-                  <a:srgbClr val="1E293B"/>
-                </a:solidFill>
-              </a:defRPr>
-            </a:pPr>
-            <a:r>
-              <a:t>   Switch inspects Source MAC of incoming frame to update `(MAC, Port, TTL)` table. If Destination MAC is in table $\implies$ selective forward to specific port; if destination unknown/broadcast $\implies$ flood to all ports except incoming.</a:t>
-            </a:r>
-          </a:p>
-          <a:p>
-            <a:pPr>
-              <a:spcAft>
-                <a:spcPts val="200"/>
-              </a:spcAft>
-              <a:defRPr b="1" sz="1500">
-                <a:solidFill>
-                  <a:srgbClr val="0F1E4A"/>
-                </a:solidFill>
-              </a:defRPr>
-            </a:pPr>
-            <a:r>
-              <a:t>• Network Layer (L3): Routers</a:t>
-            </a:r>
-          </a:p>
-          <a:p>
-            <a:pPr>
-              <a:spcAft>
-                <a:spcPts val="800"/>
-              </a:spcAft>
-              <a:defRPr sz="1300">
-                <a:solidFill>
-                  <a:srgbClr val="1E293B"/>
-                </a:solidFill>
-              </a:defRPr>
-            </a:pPr>
-            <a:r>
-              <a:t>   Forward packets based on 32-bit/128-bit IP addresses. Break network into separate Collision Domains AND separate Broadcast Domains.</a:t>
-            </a:r>
-          </a:p>
-        </p:txBody>
-      </p:sp>
-      <p:sp>
-        <p:nvSpPr>
-          <p:cNvPr id="7" name="Rounded Rectangle 6"/>
+          <p:cNvPr id="6" name="Rounded Rectangle 5"/>
           <p:cNvSpPr/>
           <p:nvPr/>
         </p:nvSpPr>
         <p:spPr>
           <a:xfrm>
-            <a:off x="7955279" y="1280160"/>
-            <a:ext cx="3566160" cy="4846320"/>
+            <a:off x="731520" y="1234440"/>
+            <a:ext cx="3383280" cy="4892040"/>
           </a:xfrm>
           <a:prstGeom prst="roundRect">
             <a:avLst/>
           </a:prstGeom>
           <a:solidFill>
-            <a:srgbClr val="F1F5F9"/>
+            <a:srgbClr val="F8FAFC"/>
           </a:solidFill>
           <a:ln w="19050">
             <a:solidFill>
-              <a:srgbClr val="0E7490"/>
+              <a:srgbClr val="0F1E4A"/>
             </a:solidFill>
           </a:ln>
         </p:spPr>
@@ -3632,14 +3628,14 @@
       </p:sp>
       <p:sp>
         <p:nvSpPr>
-          <p:cNvPr id="8" name="TextBox 7"/>
+          <p:cNvPr id="7" name="TextBox 6"/>
           <p:cNvSpPr txBox="1"/>
           <p:nvPr/>
         </p:nvSpPr>
         <p:spPr>
           <a:xfrm>
-            <a:off x="8138160" y="1417320"/>
-            <a:ext cx="3200400" cy="4572000"/>
+            <a:off x="914400" y="1371600"/>
+            <a:ext cx="3017520" cy="4572000"/>
           </a:xfrm>
           <a:prstGeom prst="rect">
             <a:avLst/>
@@ -3656,75 +3652,135 @@
               <a:spcAft>
                 <a:spcPts val="1000"/>
               </a:spcAft>
-              <a:defRPr b="1" sz="1500">
-                <a:solidFill>
-                  <a:srgbClr val="0E7490"/>
-                </a:solidFill>
-              </a:defRPr>
-            </a:pPr>
-            <a:r>
-              <a:t>Device Hierarchy</a:t>
+              <a:defRPr b="1" sz="1550">
+                <a:solidFill>
+                  <a:srgbClr val="0F1E4A"/>
+                </a:solidFill>
+              </a:defRPr>
+            </a:pPr>
+            <a:r>
+              <a:t>Layer 1: Repeaters &amp; Hubs</a:t>
             </a:r>
           </a:p>
           <a:p>
             <a:pPr>
               <a:spcAft>
-                <a:spcPts val="600"/>
+                <a:spcPts val="500"/>
               </a:spcAft>
               <a:defRPr sz="1200">
                 <a:solidFill>
-                  <a:srgbClr val="1E293B"/>
-                </a:solidFill>
-              </a:defRPr>
-            </a:pPr>
-            <a:r>
-              <a:t>→ L1 Hub: Bit repeater (dumb)</a:t>
+                  <a:srgbClr val="0F172A"/>
+                </a:solidFill>
+              </a:defRPr>
+            </a:pPr>
+            <a:r>
+              <a:t>• Operating Layer: Physical Layer (L1)</a:t>
             </a:r>
           </a:p>
           <a:p>
             <a:pPr>
               <a:spcAft>
-                <a:spcPts val="600"/>
+                <a:spcPts val="500"/>
               </a:spcAft>
               <a:defRPr sz="1200">
                 <a:solidFill>
-                  <a:srgbClr val="1E293B"/>
-                </a:solidFill>
-              </a:defRPr>
-            </a:pPr>
-            <a:r>
-              <a:t>→ L2 Switch: Frame filter (MAC)</a:t>
+                  <a:srgbClr val="0F172A"/>
+                </a:solidFill>
+              </a:defRPr>
+            </a:pPr>
+            <a:r>
+              <a:t>• Function: Regenerates and amplifies electrical/optical signals; broadcasts incoming bits to all ports</a:t>
             </a:r>
           </a:p>
           <a:p>
             <a:pPr>
               <a:spcAft>
-                <a:spcPts val="600"/>
+                <a:spcPts val="500"/>
               </a:spcAft>
               <a:defRPr sz="1200">
                 <a:solidFill>
-                  <a:srgbClr val="1E293B"/>
-                </a:solidFill>
-              </a:defRPr>
-            </a:pPr>
-            <a:r>
-              <a:t>→ L3 Router: Packet forwarder (IP)</a:t>
+                  <a:srgbClr val="0F172A"/>
+                </a:solidFill>
+              </a:defRPr>
+            </a:pPr>
+            <a:r>
+              <a:t>• Collision Domains: Single shared collision domain across all ports</a:t>
             </a:r>
           </a:p>
           <a:p>
             <a:pPr>
               <a:spcAft>
-                <a:spcPts val="600"/>
+                <a:spcPts val="500"/>
               </a:spcAft>
               <a:defRPr sz="1200">
                 <a:solidFill>
-                  <a:srgbClr val="1E293B"/>
-                </a:solidFill>
-              </a:defRPr>
-            </a:pPr>
-            <a:r>
-              <a:t>→ L7 Gateway: Protocol translation</a:t>
-            </a:r>
+                  <a:srgbClr val="0F172A"/>
+                </a:solidFill>
+              </a:defRPr>
+            </a:pPr>
+            <a:r>
+              <a:t>• Broadcast Domains: Single broadcast domain</a:t>
+            </a:r>
+          </a:p>
+          <a:p>
+            <a:pPr>
+              <a:spcAft>
+                <a:spcPts val="500"/>
+              </a:spcAft>
+              <a:defRPr sz="1200">
+                <a:solidFill>
+                  <a:srgbClr val="0F172A"/>
+                </a:solidFill>
+              </a:defRPr>
+            </a:pPr>
+            <a:r>
+              <a:t>• Intelligence: Zero intelligence / No buffering</a:t>
+            </a:r>
+          </a:p>
+        </p:txBody>
+      </p:sp>
+      <p:sp>
+        <p:nvSpPr>
+          <p:cNvPr id="8" name="Rounded Rectangle 7"/>
+          <p:cNvSpPr/>
+          <p:nvPr/>
+        </p:nvSpPr>
+        <p:spPr>
+          <a:xfrm>
+            <a:off x="4389120" y="1234440"/>
+            <a:ext cx="3383280" cy="4892040"/>
+          </a:xfrm>
+          <a:prstGeom prst="roundRect">
+            <a:avLst/>
+          </a:prstGeom>
+          <a:solidFill>
+            <a:srgbClr val="EEF2FF"/>
+          </a:solidFill>
+          <a:ln w="19050">
+            <a:solidFill>
+              <a:srgbClr val="0E7490"/>
+            </a:solidFill>
+          </a:ln>
+        </p:spPr>
+        <p:style>
+          <a:lnRef idx="1">
+            <a:schemeClr val="accent1"/>
+          </a:lnRef>
+          <a:fillRef idx="3">
+            <a:schemeClr val="accent1"/>
+          </a:fillRef>
+          <a:effectRef idx="2">
+            <a:schemeClr val="accent1"/>
+          </a:effectRef>
+          <a:fontRef idx="minor">
+            <a:schemeClr val="lt1"/>
+          </a:fontRef>
+        </p:style>
+        <p:txBody>
+          <a:bodyPr rtlCol="0" anchor="ctr"/>
+          <a:lstStyle/>
+          <a:p>
+            <a:pPr algn="ctr"/>
           </a:p>
         </p:txBody>
       </p:sp>
@@ -3736,8 +3792,8 @@
         </p:nvSpPr>
         <p:spPr>
           <a:xfrm>
-            <a:off x="731520" y="6309360"/>
-            <a:ext cx="10789920" cy="365760"/>
+            <a:off x="4572000" y="1371600"/>
+            <a:ext cx="3017520" cy="4572000"/>
           </a:xfrm>
           <a:prstGeom prst="rect">
             <a:avLst/>
@@ -3745,6 +3801,277 @@
           <a:noFill/>
         </p:spPr>
         <p:txBody>
+          <a:bodyPr wrap="square">
+            <a:spAutoFit/>
+          </a:bodyPr>
+          <a:lstStyle/>
+          <a:p>
+            <a:pPr>
+              <a:spcAft>
+                <a:spcPts val="1000"/>
+              </a:spcAft>
+              <a:defRPr b="1" sz="1550">
+                <a:solidFill>
+                  <a:srgbClr val="0E7490"/>
+                </a:solidFill>
+              </a:defRPr>
+            </a:pPr>
+            <a:r>
+              <a:t>Layer 2: Bridges &amp; Switches</a:t>
+            </a:r>
+          </a:p>
+          <a:p>
+            <a:pPr>
+              <a:spcAft>
+                <a:spcPts val="500"/>
+              </a:spcAft>
+              <a:defRPr sz="1200">
+                <a:solidFill>
+                  <a:srgbClr val="0F172A"/>
+                </a:solidFill>
+              </a:defRPr>
+            </a:pPr>
+            <a:r>
+              <a:t>• Operating Layer: Data Link Layer (L2)</a:t>
+            </a:r>
+          </a:p>
+          <a:p>
+            <a:pPr>
+              <a:spcAft>
+                <a:spcPts val="500"/>
+              </a:spcAft>
+              <a:defRPr sz="1200">
+                <a:solidFill>
+                  <a:srgbClr val="0F172A"/>
+                </a:solidFill>
+              </a:defRPr>
+            </a:pPr>
+            <a:r>
+              <a:t>• Function: Inspects MAC addresses; filters and forwards frames selectively using hardware MAC Learning table</a:t>
+            </a:r>
+          </a:p>
+          <a:p>
+            <a:pPr>
+              <a:spcAft>
+                <a:spcPts val="500"/>
+              </a:spcAft>
+              <a:defRPr sz="1200">
+                <a:solidFill>
+                  <a:srgbClr val="0F172A"/>
+                </a:solidFill>
+              </a:defRPr>
+            </a:pPr>
+            <a:r>
+              <a:t>• Collision Domains: Microsegmentation: **Each individual port is an isolated collision domain**</a:t>
+            </a:r>
+          </a:p>
+          <a:p>
+            <a:pPr>
+              <a:spcAft>
+                <a:spcPts val="500"/>
+              </a:spcAft>
+              <a:defRPr sz="1200">
+                <a:solidFill>
+                  <a:srgbClr val="0F172A"/>
+                </a:solidFill>
+              </a:defRPr>
+            </a:pPr>
+            <a:r>
+              <a:t>• Broadcast Domains: Single broadcast domain (unless partitioned via VLANs)</a:t>
+            </a:r>
+          </a:p>
+          <a:p>
+            <a:pPr>
+              <a:spcAft>
+                <a:spcPts val="500"/>
+              </a:spcAft>
+              <a:defRPr sz="1200">
+                <a:solidFill>
+                  <a:srgbClr val="0F172A"/>
+                </a:solidFill>
+              </a:defRPr>
+            </a:pPr>
+            <a:r>
+              <a:t>• Buffering: Store-and-forward / Cut-through</a:t>
+            </a:r>
+          </a:p>
+        </p:txBody>
+      </p:sp>
+      <p:sp>
+        <p:nvSpPr>
+          <p:cNvPr id="10" name="Rounded Rectangle 9"/>
+          <p:cNvSpPr/>
+          <p:nvPr/>
+        </p:nvSpPr>
+        <p:spPr>
+          <a:xfrm>
+            <a:off x="8046720" y="1234440"/>
+            <a:ext cx="3383280" cy="4892040"/>
+          </a:xfrm>
+          <a:prstGeom prst="roundRect">
+            <a:avLst/>
+          </a:prstGeom>
+          <a:solidFill>
+            <a:srgbClr val="F8FAFC"/>
+          </a:solidFill>
+          <a:ln w="19050">
+            <a:solidFill>
+              <a:srgbClr val="D97706"/>
+            </a:solidFill>
+          </a:ln>
+        </p:spPr>
+        <p:style>
+          <a:lnRef idx="1">
+            <a:schemeClr val="accent1"/>
+          </a:lnRef>
+          <a:fillRef idx="3">
+            <a:schemeClr val="accent1"/>
+          </a:fillRef>
+          <a:effectRef idx="2">
+            <a:schemeClr val="accent1"/>
+          </a:effectRef>
+          <a:fontRef idx="minor">
+            <a:schemeClr val="lt1"/>
+          </a:fontRef>
+        </p:style>
+        <p:txBody>
+          <a:bodyPr rtlCol="0" anchor="ctr"/>
+          <a:lstStyle/>
+          <a:p>
+            <a:pPr algn="ctr"/>
+          </a:p>
+        </p:txBody>
+      </p:sp>
+      <p:sp>
+        <p:nvSpPr>
+          <p:cNvPr id="11" name="TextBox 10"/>
+          <p:cNvSpPr txBox="1"/>
+          <p:nvPr/>
+        </p:nvSpPr>
+        <p:spPr>
+          <a:xfrm>
+            <a:off x="8229600" y="1371600"/>
+            <a:ext cx="3017520" cy="4572000"/>
+          </a:xfrm>
+          <a:prstGeom prst="rect">
+            <a:avLst/>
+          </a:prstGeom>
+          <a:noFill/>
+        </p:spPr>
+        <p:txBody>
+          <a:bodyPr wrap="square">
+            <a:spAutoFit/>
+          </a:bodyPr>
+          <a:lstStyle/>
+          <a:p>
+            <a:pPr>
+              <a:spcAft>
+                <a:spcPts val="1000"/>
+              </a:spcAft>
+              <a:defRPr b="1" sz="1550">
+                <a:solidFill>
+                  <a:srgbClr val="D97706"/>
+                </a:solidFill>
+              </a:defRPr>
+            </a:pPr>
+            <a:r>
+              <a:t>Layer 3: Routers &amp; L3 Switches</a:t>
+            </a:r>
+          </a:p>
+          <a:p>
+            <a:pPr>
+              <a:spcAft>
+                <a:spcPts val="500"/>
+              </a:spcAft>
+              <a:defRPr sz="1200">
+                <a:solidFill>
+                  <a:srgbClr val="0F172A"/>
+                </a:solidFill>
+              </a:defRPr>
+            </a:pPr>
+            <a:r>
+              <a:t>• Operating Layer: Network Layer (L3)</a:t>
+            </a:r>
+          </a:p>
+          <a:p>
+            <a:pPr>
+              <a:spcAft>
+                <a:spcPts val="500"/>
+              </a:spcAft>
+              <a:defRPr sz="1200">
+                <a:solidFill>
+                  <a:srgbClr val="0F172A"/>
+                </a:solidFill>
+              </a:defRPr>
+            </a:pPr>
+            <a:r>
+              <a:t>• Function: Routes packets across heterogeneous networks using IP addresses</a:t>
+            </a:r>
+          </a:p>
+          <a:p>
+            <a:pPr>
+              <a:spcAft>
+                <a:spcPts val="500"/>
+              </a:spcAft>
+              <a:defRPr sz="1200">
+                <a:solidFill>
+                  <a:srgbClr val="0F172A"/>
+                </a:solidFill>
+              </a:defRPr>
+            </a:pPr>
+            <a:r>
+              <a:t>• Collision Domains: Separate collision domain per port</a:t>
+            </a:r>
+          </a:p>
+          <a:p>
+            <a:pPr>
+              <a:spcAft>
+                <a:spcPts val="500"/>
+              </a:spcAft>
+              <a:defRPr sz="1200">
+                <a:solidFill>
+                  <a:srgbClr val="0F172A"/>
+                </a:solidFill>
+              </a:defRPr>
+            </a:pPr>
+            <a:r>
+              <a:t>• Broadcast Domains: **Separates broadcast domains** (does not forward L2 broadcasts)</a:t>
+            </a:r>
+          </a:p>
+          <a:p>
+            <a:pPr>
+              <a:spcAft>
+                <a:spcPts val="500"/>
+              </a:spcAft>
+              <a:defRPr sz="1200">
+                <a:solidFill>
+                  <a:srgbClr val="0F172A"/>
+                </a:solidFill>
+              </a:defRPr>
+            </a:pPr>
+            <a:r>
+              <a:t>• Routing Table: Maintains FIB routing table</a:t>
+            </a:r>
+          </a:p>
+        </p:txBody>
+      </p:sp>
+      <p:sp>
+        <p:nvSpPr>
+          <p:cNvPr id="12" name="TextBox 11"/>
+          <p:cNvSpPr txBox="1"/>
+          <p:nvPr/>
+        </p:nvSpPr>
+        <p:spPr>
+          <a:xfrm>
+            <a:off x="731520" y="6327648"/>
+            <a:ext cx="10789920" cy="320040"/>
+          </a:xfrm>
+          <a:prstGeom prst="rect">
+            <a:avLst/>
+          </a:prstGeom>
+          <a:noFill/>
+        </p:spPr>
+        <p:txBody>
           <a:bodyPr wrap="none">
             <a:spAutoFit/>
           </a:bodyPr>
@@ -3759,6 +4086,41 @@
             </a:pPr>
             <a:r>
               <a:t>PCCST501 Computer Networks | KTU 2024 Scheme | Prof. Anju Markose | Assistant Professor, Dept. of CSE | VJCET</a:t>
+            </a:r>
+          </a:p>
+        </p:txBody>
+      </p:sp>
+      <p:sp>
+        <p:nvSpPr>
+          <p:cNvPr id="13" name="TextBox 12"/>
+          <p:cNvSpPr txBox="1"/>
+          <p:nvPr/>
+        </p:nvSpPr>
+        <p:spPr>
+          <a:xfrm>
+            <a:off x="6858000" y="6327648"/>
+            <a:ext cx="4572000" cy="320040"/>
+          </a:xfrm>
+          <a:prstGeom prst="rect">
+            <a:avLst/>
+          </a:prstGeom>
+          <a:noFill/>
+        </p:spPr>
+        <p:txBody>
+          <a:bodyPr wrap="none">
+            <a:spAutoFit/>
+          </a:bodyPr>
+          <a:lstStyle/>
+          <a:p>
+            <a:pPr algn="r">
+              <a:defRPr sz="950">
+                <a:solidFill>
+                  <a:srgbClr val="64748B"/>
+                </a:solidFill>
+              </a:defRPr>
+            </a:pPr>
+            <a:r>
+              <a:t>Dept. of CSE, VJCET</a:t>
             </a:r>
           </a:p>
         </p:txBody>
@@ -3890,14 +4252,14 @@
           <a:lstStyle/>
           <a:p>
             <a:pPr>
-              <a:defRPr b="1" sz="2300">
+              <a:defRPr b="1" sz="2200">
                 <a:solidFill>
                   <a:srgbClr val="F8FAFC"/>
                 </a:solidFill>
               </a:defRPr>
             </a:pPr>
             <a:r>
-              <a:t>3.6.2 Collision Domains vs Broadcast Domains Matrix</a:t>
+              <a:t>3.6.2 Spanning Tree Protocol (IEEE 802.1D STP)</a:t>
             </a:r>
           </a:p>
         </p:txBody>
@@ -3932,27 +4294,170 @@
               </a:defRPr>
             </a:pPr>
             <a:r>
-              <a:t>M3.6 DOMAIN ANALYSIS</a:t>
-            </a:r>
-          </a:p>
-        </p:txBody>
-      </p:sp>
-      <p:sp>
-        <p:nvSpPr>
-          <p:cNvPr id="6" name="Rounded Rectangle 5"/>
+              <a:t>M3.6 SPANNING TREE PROTOCOL</a:t>
+            </a:r>
+          </a:p>
+        </p:txBody>
+      </p:sp>
+      <p:sp>
+        <p:nvSpPr>
+          <p:cNvPr id="6" name="TextBox 5"/>
+          <p:cNvSpPr txBox="1"/>
+          <p:nvPr/>
+        </p:nvSpPr>
+        <p:spPr>
+          <a:xfrm>
+            <a:off x="731520" y="1234440"/>
+            <a:ext cx="6858000" cy="4937760"/>
+          </a:xfrm>
+          <a:prstGeom prst="rect">
+            <a:avLst/>
+          </a:prstGeom>
+          <a:noFill/>
+        </p:spPr>
+        <p:txBody>
+          <a:bodyPr wrap="square">
+            <a:spAutoFit/>
+          </a:bodyPr>
+          <a:lstStyle/>
+          <a:p>
+            <a:pPr>
+              <a:spcAft>
+                <a:spcPts val="200"/>
+              </a:spcAft>
+              <a:defRPr b="1" sz="1450">
+                <a:solidFill>
+                  <a:srgbClr val="0F1E4A"/>
+                </a:solidFill>
+              </a:defRPr>
+            </a:pPr>
+            <a:r>
+              <a:t>• The Layer 2 Loop Problem</a:t>
+            </a:r>
+          </a:p>
+          <a:p>
+            <a:pPr>
+              <a:spcAft>
+                <a:spcPts val="700"/>
+              </a:spcAft>
+              <a:defRPr sz="1250">
+                <a:solidFill>
+                  <a:srgbClr val="0F172A"/>
+                </a:solidFill>
+              </a:defRPr>
+            </a:pPr>
+            <a:r>
+              <a:t>   Redundant links between switches provide fault tolerance, but create disastrous **Broadcast Storms**, multiple frame copies, and MAC table instability.</a:t>
+            </a:r>
+          </a:p>
+          <a:p>
+            <a:pPr>
+              <a:spcAft>
+                <a:spcPts val="200"/>
+              </a:spcAft>
+              <a:defRPr b="1" sz="1450">
+                <a:solidFill>
+                  <a:srgbClr val="0F1E4A"/>
+                </a:solidFill>
+              </a:defRPr>
+            </a:pPr>
+            <a:r>
+              <a:t>• STP Goal</a:t>
+            </a:r>
+          </a:p>
+          <a:p>
+            <a:pPr>
+              <a:spcAft>
+                <a:spcPts val="700"/>
+              </a:spcAft>
+              <a:defRPr sz="1250">
+                <a:solidFill>
+                  <a:srgbClr val="0F172A"/>
+                </a:solidFill>
+              </a:defRPr>
+            </a:pPr>
+            <a:r>
+              <a:t>   Logically disables redundant links by placing them in Blocking state, dynamically constructing a loop-free active tree topology while keeping backup paths on standby.</a:t>
+            </a:r>
+          </a:p>
+          <a:p>
+            <a:pPr>
+              <a:spcAft>
+                <a:spcPts val="200"/>
+              </a:spcAft>
+              <a:defRPr b="1" sz="1450">
+                <a:solidFill>
+                  <a:srgbClr val="0F1E4A"/>
+                </a:solidFill>
+              </a:defRPr>
+            </a:pPr>
+            <a:r>
+              <a:t>• BPDU (Bridge Protocol Data Units)</a:t>
+            </a:r>
+          </a:p>
+          <a:p>
+            <a:pPr>
+              <a:spcAft>
+                <a:spcPts val="700"/>
+              </a:spcAft>
+              <a:defRPr sz="1250">
+                <a:solidFill>
+                  <a:srgbClr val="0F172A"/>
+                </a:solidFill>
+              </a:defRPr>
+            </a:pPr>
+            <a:r>
+              <a:t>   Switches exchange BPDUs containing: `Bridge ID = Priority (2B) + MAC Address (6B)` (Default priority = 32768).</a:t>
+            </a:r>
+          </a:p>
+          <a:p>
+            <a:pPr>
+              <a:spcAft>
+                <a:spcPts val="200"/>
+              </a:spcAft>
+              <a:defRPr b="1" sz="1450">
+                <a:solidFill>
+                  <a:srgbClr val="0F1E4A"/>
+                </a:solidFill>
+              </a:defRPr>
+            </a:pPr>
+            <a:r>
+              <a:t>• 4-Step STP Algorithm</a:t>
+            </a:r>
+          </a:p>
+          <a:p>
+            <a:pPr>
+              <a:spcAft>
+                <a:spcPts val="700"/>
+              </a:spcAft>
+              <a:defRPr sz="1250">
+                <a:solidFill>
+                  <a:srgbClr val="0F172A"/>
+                </a:solidFill>
+              </a:defRPr>
+            </a:pPr>
+            <a:r>
+              <a:t>   1. **Root Bridge Election**: Switch with the lowest Bridge ID becomes the Root Bridge. \n 2. **Root Port (RP) Selection**: On each non-root switch, the port with the lowest path cost to the Root Bridge is selected as RP. \n 3. **Designated Port (DP) Selection**: On each LAN segment, the port with the lowest path cost to Root becomes DP. \n 4. **Blocking State**: All remaining ports are placed in Blocking/Discarding state to break loops.</a:t>
+            </a:r>
+          </a:p>
+        </p:txBody>
+      </p:sp>
+      <p:sp>
+        <p:nvSpPr>
+          <p:cNvPr id="7" name="Rounded Rectangle 6"/>
           <p:cNvSpPr/>
           <p:nvPr/>
         </p:nvSpPr>
         <p:spPr>
           <a:xfrm>
-            <a:off x="731520" y="1280160"/>
-            <a:ext cx="5212080" cy="4846320"/>
+            <a:off x="7955279" y="1234440"/>
+            <a:ext cx="3566160" cy="4892040"/>
           </a:xfrm>
           <a:prstGeom prst="roundRect">
             <a:avLst/>
           </a:prstGeom>
           <a:solidFill>
-            <a:srgbClr val="F1F5F9"/>
+            <a:srgbClr val="F8FAFC"/>
           </a:solidFill>
           <a:ln w="19050">
             <a:solidFill>
@@ -3984,14 +4489,14 @@
       </p:sp>
       <p:sp>
         <p:nvSpPr>
-          <p:cNvPr id="7" name="TextBox 6"/>
+          <p:cNvPr id="8" name="TextBox 7"/>
           <p:cNvSpPr txBox="1"/>
           <p:nvPr/>
         </p:nvSpPr>
         <p:spPr>
           <a:xfrm>
-            <a:off x="914400" y="1417320"/>
-            <a:ext cx="4846320" cy="4572000"/>
+            <a:off x="8138160" y="1371600"/>
+            <a:ext cx="3200400" cy="4572000"/>
           </a:xfrm>
           <a:prstGeom prst="rect">
             <a:avLst/>
@@ -4006,16 +4511,16 @@
           <a:p>
             <a:pPr>
               <a:spcAft>
-                <a:spcPts val="1200"/>
+                <a:spcPts val="1000"/>
               </a:spcAft>
-              <a:defRPr b="1" sz="1600">
-                <a:solidFill>
-                  <a:srgbClr val="0F1E4A"/>
-                </a:solidFill>
-              </a:defRPr>
-            </a:pPr>
-            <a:r>
-              <a:t>Collision Domain</a:t>
+              <a:defRPr b="1" sz="1500">
+                <a:solidFill>
+                  <a:srgbClr val="0E7490"/>
+                </a:solidFill>
+              </a:defRPr>
+            </a:pPr>
+            <a:r>
+              <a:t>STP Algorithm Steps</a:t>
             </a:r>
           </a:p>
           <a:p>
@@ -4023,14 +4528,14 @@
               <a:spcAft>
                 <a:spcPts val="600"/>
               </a:spcAft>
-              <a:defRPr sz="1250">
-                <a:solidFill>
-                  <a:srgbClr val="1E293B"/>
-                </a:solidFill>
-              </a:defRPr>
-            </a:pPr>
-            <a:r>
-              <a:t>• Definition: Network segment where simultaneous transmissions cause physical signal collision</a:t>
+              <a:defRPr sz="1200">
+                <a:solidFill>
+                  <a:srgbClr val="0F172A"/>
+                </a:solidFill>
+              </a:defRPr>
+            </a:pPr>
+            <a:r>
+              <a:t>→ 1. Lowest Bridge ID -&gt; Root Bridge</a:t>
             </a:r>
           </a:p>
           <a:p>
@@ -4038,14 +4543,14 @@
               <a:spcAft>
                 <a:spcPts val="600"/>
               </a:spcAft>
-              <a:defRPr sz="1250">
-                <a:solidFill>
-                  <a:srgbClr val="1E293B"/>
-                </a:solidFill>
-              </a:defRPr>
-            </a:pPr>
-            <a:r>
-              <a:t>• Hub / Repeater: Entire hub is 1 single collision domain</a:t>
+              <a:defRPr sz="1200">
+                <a:solidFill>
+                  <a:srgbClr val="0F172A"/>
+                </a:solidFill>
+              </a:defRPr>
+            </a:pPr>
+            <a:r>
+              <a:t>→ 2. Lowest Cost to Root -&gt; Root Port (RP)</a:t>
             </a:r>
           </a:p>
           <a:p>
@@ -4053,14 +4558,14 @@
               <a:spcAft>
                 <a:spcPts val="600"/>
               </a:spcAft>
-              <a:defRPr sz="1250">
-                <a:solidFill>
-                  <a:srgbClr val="1E293B"/>
-                </a:solidFill>
-              </a:defRPr>
-            </a:pPr>
-            <a:r>
-              <a:t>• Layer 2 Switch: Each individual switch port is an isolated collision domain ($N$ ports = $N$ domains)</a:t>
+              <a:defRPr sz="1200">
+                <a:solidFill>
+                  <a:srgbClr val="0F172A"/>
+                </a:solidFill>
+              </a:defRPr>
+            </a:pPr>
+            <a:r>
+              <a:t>→ 3. Lowest Cost per Link -&gt; Designated Port (DP)</a:t>
             </a:r>
           </a:p>
           <a:p>
@@ -4068,14 +4573,14 @@
               <a:spcAft>
                 <a:spcPts val="600"/>
               </a:spcAft>
-              <a:defRPr sz="1250">
-                <a:solidFill>
-                  <a:srgbClr val="1E293B"/>
-                </a:solidFill>
-              </a:defRPr>
-            </a:pPr>
-            <a:r>
-              <a:t>• Router: Each router interface is an isolated collision domain</a:t>
+              <a:defRPr sz="1200">
+                <a:solidFill>
+                  <a:srgbClr val="0F172A"/>
+                </a:solidFill>
+              </a:defRPr>
+            </a:pPr>
+            <a:r>
+              <a:t>→ 4. Remaining Ports -&gt; Blocked / Alternate</a:t>
             </a:r>
           </a:p>
           <a:p>
@@ -4083,39 +4588,125 @@
               <a:spcAft>
                 <a:spcPts val="600"/>
               </a:spcAft>
-              <a:defRPr sz="1250">
-                <a:solidFill>
-                  <a:srgbClr val="1E293B"/>
-                </a:solidFill>
-              </a:defRPr>
-            </a:pPr>
-            <a:r>
-              <a:t>• Full-Duplex Switch: Zero collisions occur in full-duplex switch links!</a:t>
-            </a:r>
-          </a:p>
-        </p:txBody>
-      </p:sp>
-      <p:sp>
-        <p:nvSpPr>
-          <p:cNvPr id="8" name="Rounded Rectangle 7"/>
+              <a:defRPr sz="1200">
+                <a:solidFill>
+                  <a:srgbClr val="0F172A"/>
+                </a:solidFill>
+              </a:defRPr>
+            </a:pPr>
+            <a:r>
+              <a:t>→ Convergence time: ~30-50 seconds (RSTP: &lt; 1s)</a:t>
+            </a:r>
+          </a:p>
+        </p:txBody>
+      </p:sp>
+      <p:sp>
+        <p:nvSpPr>
+          <p:cNvPr id="9" name="TextBox 8"/>
+          <p:cNvSpPr txBox="1"/>
+          <p:nvPr/>
+        </p:nvSpPr>
+        <p:spPr>
+          <a:xfrm>
+            <a:off x="731520" y="6327648"/>
+            <a:ext cx="10789920" cy="320040"/>
+          </a:xfrm>
+          <a:prstGeom prst="rect">
+            <a:avLst/>
+          </a:prstGeom>
+          <a:noFill/>
+        </p:spPr>
+        <p:txBody>
+          <a:bodyPr wrap="none">
+            <a:spAutoFit/>
+          </a:bodyPr>
+          <a:lstStyle/>
+          <a:p>
+            <a:pPr>
+              <a:defRPr sz="950">
+                <a:solidFill>
+                  <a:srgbClr val="64748B"/>
+                </a:solidFill>
+              </a:defRPr>
+            </a:pPr>
+            <a:r>
+              <a:t>PCCST501 Computer Networks | KTU 2024 Scheme | Prof. Anju Markose | Assistant Professor, Dept. of CSE | VJCET</a:t>
+            </a:r>
+          </a:p>
+        </p:txBody>
+      </p:sp>
+      <p:sp>
+        <p:nvSpPr>
+          <p:cNvPr id="10" name="TextBox 9"/>
+          <p:cNvSpPr txBox="1"/>
+          <p:nvPr/>
+        </p:nvSpPr>
+        <p:spPr>
+          <a:xfrm>
+            <a:off x="6858000" y="6327648"/>
+            <a:ext cx="4572000" cy="320040"/>
+          </a:xfrm>
+          <a:prstGeom prst="rect">
+            <a:avLst/>
+          </a:prstGeom>
+          <a:noFill/>
+        </p:spPr>
+        <p:txBody>
+          <a:bodyPr wrap="none">
+            <a:spAutoFit/>
+          </a:bodyPr>
+          <a:lstStyle/>
+          <a:p>
+            <a:pPr algn="r">
+              <a:defRPr sz="950">
+                <a:solidFill>
+                  <a:srgbClr val="64748B"/>
+                </a:solidFill>
+              </a:defRPr>
+            </a:pPr>
+            <a:r>
+              <a:t>Dept. of CSE, VJCET</a:t>
+            </a:r>
+          </a:p>
+        </p:txBody>
+      </p:sp>
+    </p:spTree>
+  </p:cSld>
+  <p:clrMapOvr>
+    <a:masterClrMapping/>
+  </p:clrMapOvr>
+</p:sld>
+</file>
+
+<file path=ppt/slides/slide4.xml><?xml version="1.0" encoding="utf-8"?>
+<p:sld xmlns:a="http://schemas.openxmlformats.org/drawingml/2006/main" xmlns:p="http://schemas.openxmlformats.org/presentationml/2006/main" xmlns:r="http://schemas.openxmlformats.org/officeDocument/2006/relationships">
+  <p:cSld>
+    <p:spTree>
+      <p:nvGrpSpPr>
+        <p:cNvPr id="1" name=""/>
+        <p:cNvGrpSpPr/>
+        <p:nvPr/>
+      </p:nvGrpSpPr>
+      <p:grpSpPr/>
+      <p:sp>
+        <p:nvSpPr>
+          <p:cNvPr id="2" name="Rectangle 1"/>
           <p:cNvSpPr/>
           <p:nvPr/>
         </p:nvSpPr>
         <p:spPr>
           <a:xfrm>
-            <a:off x="6309360" y="1280160"/>
-            <a:ext cx="5212080" cy="4846320"/>
-          </a:xfrm>
-          <a:prstGeom prst="roundRect">
+            <a:off x="0" y="0"/>
+            <a:ext cx="12191695" cy="1005840"/>
+          </a:xfrm>
+          <a:prstGeom prst="rect">
             <a:avLst/>
           </a:prstGeom>
           <a:solidFill>
-            <a:srgbClr val="EEF2FF"/>
+            <a:srgbClr val="0F1E4A"/>
           </a:solidFill>
-          <a:ln w="19050">
-            <a:solidFill>
-              <a:srgbClr val="0F1E4A"/>
-            </a:solidFill>
+          <a:ln>
+            <a:noFill/>
           </a:ln>
         </p:spPr>
         <p:style>
@@ -4142,14 +4733,57 @@
       </p:sp>
       <p:sp>
         <p:nvSpPr>
-          <p:cNvPr id="9" name="TextBox 8"/>
+          <p:cNvPr id="3" name="Rectangle 2"/>
+          <p:cNvSpPr/>
+          <p:nvPr/>
+        </p:nvSpPr>
+        <p:spPr>
+          <a:xfrm>
+            <a:off x="0" y="969264"/>
+            <a:ext cx="12191695" cy="36576"/>
+          </a:xfrm>
+          <a:prstGeom prst="rect">
+            <a:avLst/>
+          </a:prstGeom>
+          <a:solidFill>
+            <a:srgbClr val="D97706"/>
+          </a:solidFill>
+          <a:ln>
+            <a:noFill/>
+          </a:ln>
+        </p:spPr>
+        <p:style>
+          <a:lnRef idx="1">
+            <a:schemeClr val="accent1"/>
+          </a:lnRef>
+          <a:fillRef idx="3">
+            <a:schemeClr val="accent1"/>
+          </a:fillRef>
+          <a:effectRef idx="2">
+            <a:schemeClr val="accent1"/>
+          </a:effectRef>
+          <a:fontRef idx="minor">
+            <a:schemeClr val="lt1"/>
+          </a:fontRef>
+        </p:style>
+        <p:txBody>
+          <a:bodyPr rtlCol="0" anchor="ctr"/>
+          <a:lstStyle/>
+          <a:p>
+            <a:pPr algn="ctr"/>
+          </a:p>
+        </p:txBody>
+      </p:sp>
+      <p:sp>
+        <p:nvSpPr>
+          <p:cNvPr id="4" name="TextBox 3"/>
           <p:cNvSpPr txBox="1"/>
           <p:nvPr/>
         </p:nvSpPr>
         <p:spPr>
           <a:xfrm>
-            <a:off x="6492240" y="1417320"/>
-            <a:ext cx="4846320" cy="4572000"/>
+            <a:off x="731520" y="164592"/>
+            <a:ext cx="8412480" cy="685800"/>
           </a:xfrm>
           <a:prstGeom prst="rect">
             <a:avLst/>
@@ -4157,6 +4791,121 @@
           <a:noFill/>
         </p:spPr>
         <p:txBody>
+          <a:bodyPr wrap="none">
+            <a:spAutoFit/>
+          </a:bodyPr>
+          <a:lstStyle/>
+          <a:p>
+            <a:pPr>
+              <a:defRPr b="1" sz="2100">
+                <a:solidFill>
+                  <a:srgbClr val="F8FAFC"/>
+                </a:solidFill>
+              </a:defRPr>
+            </a:pPr>
+            <a:r>
+              <a:t>🎯 Exam Booster &amp; Review: Connecting Devices &amp; STP</a:t>
+            </a:r>
+          </a:p>
+        </p:txBody>
+      </p:sp>
+      <p:sp>
+        <p:nvSpPr>
+          <p:cNvPr id="5" name="TextBox 4"/>
+          <p:cNvSpPr txBox="1"/>
+          <p:nvPr/>
+        </p:nvSpPr>
+        <p:spPr>
+          <a:xfrm>
+            <a:off x="8229600" y="164592"/>
+            <a:ext cx="3291840" cy="685800"/>
+          </a:xfrm>
+          <a:prstGeom prst="rect">
+            <a:avLst/>
+          </a:prstGeom>
+          <a:noFill/>
+        </p:spPr>
+        <p:txBody>
+          <a:bodyPr wrap="none">
+            <a:spAutoFit/>
+          </a:bodyPr>
+          <a:lstStyle/>
+          <a:p>
+            <a:pPr algn="r">
+              <a:defRPr b="1" sz="1300">
+                <a:solidFill>
+                  <a:srgbClr val="D97706"/>
+                </a:solidFill>
+              </a:defRPr>
+            </a:pPr>
+            <a:r>
+              <a:t>M3.6</a:t>
+            </a:r>
+          </a:p>
+        </p:txBody>
+      </p:sp>
+      <p:sp>
+        <p:nvSpPr>
+          <p:cNvPr id="6" name="Rounded Rectangle 5"/>
+          <p:cNvSpPr/>
+          <p:nvPr/>
+        </p:nvSpPr>
+        <p:spPr>
+          <a:xfrm>
+            <a:off x="731520" y="1234440"/>
+            <a:ext cx="5303520" cy="4892040"/>
+          </a:xfrm>
+          <a:prstGeom prst="roundRect">
+            <a:avLst/>
+          </a:prstGeom>
+          <a:solidFill>
+            <a:srgbClr val="FEF3C7"/>
+          </a:solidFill>
+          <a:ln w="19050">
+            <a:solidFill>
+              <a:srgbClr val="D97706"/>
+            </a:solidFill>
+          </a:ln>
+        </p:spPr>
+        <p:style>
+          <a:lnRef idx="1">
+            <a:schemeClr val="accent1"/>
+          </a:lnRef>
+          <a:fillRef idx="3">
+            <a:schemeClr val="accent1"/>
+          </a:fillRef>
+          <a:effectRef idx="2">
+            <a:schemeClr val="accent1"/>
+          </a:effectRef>
+          <a:fontRef idx="minor">
+            <a:schemeClr val="lt1"/>
+          </a:fontRef>
+        </p:style>
+        <p:txBody>
+          <a:bodyPr rtlCol="0" anchor="ctr"/>
+          <a:lstStyle/>
+          <a:p>
+            <a:pPr algn="ctr"/>
+          </a:p>
+        </p:txBody>
+      </p:sp>
+      <p:sp>
+        <p:nvSpPr>
+          <p:cNvPr id="7" name="TextBox 6"/>
+          <p:cNvSpPr txBox="1"/>
+          <p:nvPr/>
+        </p:nvSpPr>
+        <p:spPr>
+          <a:xfrm>
+            <a:off x="914400" y="1371600"/>
+            <a:ext cx="4937760" cy="4572000"/>
+          </a:xfrm>
+          <a:prstGeom prst="rect">
+            <a:avLst/>
+          </a:prstGeom>
+          <a:noFill/>
+        </p:spPr>
+        <p:txBody>
           <a:bodyPr wrap="square">
             <a:spAutoFit/>
           </a:bodyPr>
@@ -4164,16 +4913,129 @@
           <a:p>
             <a:pPr>
               <a:spcAft>
-                <a:spcPts val="1200"/>
+                <a:spcPts val="1000"/>
               </a:spcAft>
-              <a:defRPr b="1" sz="1600">
+              <a:defRPr b="1" sz="1450">
+                <a:solidFill>
+                  <a:srgbClr val="D97706"/>
+                </a:solidFill>
+              </a:defRPr>
+            </a:pPr>
+            <a:r>
+              <a:t>📚 KTU High-Yield Questions (K3 Apply)</a:t>
+            </a:r>
+          </a:p>
+          <a:p>
+            <a:pPr>
+              <a:spcAft>
+                <a:spcPts val="700"/>
+              </a:spcAft>
+              <a:defRPr sz="1200">
+                <a:solidFill>
+                  <a:srgbClr val="0F172A"/>
+                </a:solidFill>
+              </a:defRPr>
+            </a:pPr>
+            <a:r>
+              <a:t>Q: Compare Repeaters, Hubs, Switches, and Routers with respect to operating layer, collision domains, and broadcast domains. (8 Marks)</a:t>
+            </a:r>
+          </a:p>
+          <a:p>
+            <a:pPr>
+              <a:spcAft>
+                <a:spcPts val="700"/>
+              </a:spcAft>
+              <a:defRPr sz="1200">
+                <a:solidFill>
+                  <a:srgbClr val="0F172A"/>
+                </a:solidFill>
+              </a:defRPr>
+            </a:pPr>
+            <a:r>
+              <a:t>Q: Explain the working of the Spanning Tree Protocol (IEEE 802.1D) with Bridge ID, Root Bridge election, Root Ports, and Blocking ports. (8 Marks)</a:t>
+            </a:r>
+          </a:p>
+        </p:txBody>
+      </p:sp>
+      <p:sp>
+        <p:nvSpPr>
+          <p:cNvPr id="8" name="Rounded Rectangle 7"/>
+          <p:cNvSpPr/>
+          <p:nvPr/>
+        </p:nvSpPr>
+        <p:spPr>
+          <a:xfrm>
+            <a:off x="6309360" y="1234440"/>
+            <a:ext cx="5212080" cy="4892040"/>
+          </a:xfrm>
+          <a:prstGeom prst="roundRect">
+            <a:avLst/>
+          </a:prstGeom>
+          <a:solidFill>
+            <a:srgbClr val="EEF2FF"/>
+          </a:solidFill>
+          <a:ln w="19050">
+            <a:solidFill>
+              <a:srgbClr val="0E7490"/>
+            </a:solidFill>
+          </a:ln>
+        </p:spPr>
+        <p:style>
+          <a:lnRef idx="1">
+            <a:schemeClr val="accent1"/>
+          </a:lnRef>
+          <a:fillRef idx="3">
+            <a:schemeClr val="accent1"/>
+          </a:fillRef>
+          <a:effectRef idx="2">
+            <a:schemeClr val="accent1"/>
+          </a:effectRef>
+          <a:fontRef idx="minor">
+            <a:schemeClr val="lt1"/>
+          </a:fontRef>
+        </p:style>
+        <p:txBody>
+          <a:bodyPr rtlCol="0" anchor="ctr"/>
+          <a:lstStyle/>
+          <a:p>
+            <a:pPr algn="ctr"/>
+          </a:p>
+        </p:txBody>
+      </p:sp>
+      <p:sp>
+        <p:nvSpPr>
+          <p:cNvPr id="9" name="TextBox 8"/>
+          <p:cNvSpPr txBox="1"/>
+          <p:nvPr/>
+        </p:nvSpPr>
+        <p:spPr>
+          <a:xfrm>
+            <a:off x="6492240" y="1371600"/>
+            <a:ext cx="4846320" cy="4572000"/>
+          </a:xfrm>
+          <a:prstGeom prst="rect">
+            <a:avLst/>
+          </a:prstGeom>
+          <a:noFill/>
+        </p:spPr>
+        <p:txBody>
+          <a:bodyPr wrap="square">
+            <a:spAutoFit/>
+          </a:bodyPr>
+          <a:lstStyle/>
+          <a:p>
+            <a:pPr>
+              <a:spcAft>
+                <a:spcPts val="1000"/>
+              </a:spcAft>
+              <a:defRPr b="1" sz="1450">
                 <a:solidFill>
                   <a:srgbClr val="0E7490"/>
                 </a:solidFill>
               </a:defRPr>
             </a:pPr>
             <a:r>
-              <a:t>Broadcast Domain</a:t>
+              <a:t>💡 Critical Conceptual Takeaways</a:t>
             </a:r>
           </a:p>
           <a:p>
@@ -4181,14 +5043,14 @@
               <a:spcAft>
                 <a:spcPts val="600"/>
               </a:spcAft>
-              <a:defRPr sz="1250">
-                <a:solidFill>
-                  <a:srgbClr val="1E293B"/>
-                </a:solidFill>
-              </a:defRPr>
-            </a:pPr>
-            <a:r>
-              <a:t>• Definition: Network segment reached by an L2 broadcast frame (`FF:FF:FF:FF:FF:FF`)</a:t>
+              <a:defRPr sz="1200">
+                <a:solidFill>
+                  <a:srgbClr val="0F172A"/>
+                </a:solidFill>
+              </a:defRPr>
+            </a:pPr>
+            <a:r>
+              <a:t>✔ Hubs extend collision domains; Switches isolate collision domains; Routers isolate broadcast domains.</a:t>
             </a:r>
           </a:p>
           <a:p>
@@ -4196,14 +5058,14 @@
               <a:spcAft>
                 <a:spcPts val="600"/>
               </a:spcAft>
-              <a:defRPr sz="1250">
-                <a:solidFill>
-                  <a:srgbClr val="1E293B"/>
-                </a:solidFill>
-              </a:defRPr>
-            </a:pPr>
-            <a:r>
-              <a:t>• Hub / Switch: All connected ports belong to 1 single broadcast domain</a:t>
+              <a:defRPr sz="1200">
+                <a:solidFill>
+                  <a:srgbClr val="0F172A"/>
+                </a:solidFill>
+              </a:defRPr>
+            </a:pPr>
+            <a:r>
+              <a:t>✔ Transparent switches dynamically populate MAC tables by inspecting source MACs of arriving frames.</a:t>
             </a:r>
           </a:p>
           <a:p>
@@ -4211,29 +5073,14 @@
               <a:spcAft>
                 <a:spcPts val="600"/>
               </a:spcAft>
-              <a:defRPr sz="1250">
-                <a:solidFill>
-                  <a:srgbClr val="1E293B"/>
-                </a:solidFill>
-              </a:defRPr>
-            </a:pPr>
-            <a:r>
-              <a:t>• Switch with VLANs: Each configured VLAN forms an isolated broadcast domain ($M$ VLANs = $M$ domains)</a:t>
-            </a:r>
-          </a:p>
-          <a:p>
-            <a:pPr>
-              <a:spcAft>
-                <a:spcPts val="600"/>
-              </a:spcAft>
-              <a:defRPr sz="1250">
-                <a:solidFill>
-                  <a:srgbClr val="1E293B"/>
-                </a:solidFill>
-              </a:defRPr>
-            </a:pPr>
-            <a:r>
-              <a:t>• Router: Routers block L2 broadcasts by default; each router interface is a separate broadcast domain</a:t>
+              <a:defRPr sz="1200">
+                <a:solidFill>
+                  <a:srgbClr val="0F172A"/>
+                </a:solidFill>
+              </a:defRPr>
+            </a:pPr>
+            <a:r>
+              <a:t>✔ STP prevents broadcast storms by breaking physical switching loops into a single logical tree.</a:t>
             </a:r>
           </a:p>
         </p:txBody>
@@ -4246,8 +5093,8 @@
         </p:nvSpPr>
         <p:spPr>
           <a:xfrm>
-            <a:off x="731520" y="6309360"/>
-            <a:ext cx="10789920" cy="365760"/>
+            <a:off x="731520" y="6327648"/>
+            <a:ext cx="10789920" cy="320040"/>
           </a:xfrm>
           <a:prstGeom prst="rect">
             <a:avLst/>
@@ -4269,6 +5116,41 @@
             </a:pPr>
             <a:r>
               <a:t>PCCST501 Computer Networks | KTU 2024 Scheme | Prof. Anju Markose | Assistant Professor, Dept. of CSE | VJCET</a:t>
+            </a:r>
+          </a:p>
+        </p:txBody>
+      </p:sp>
+      <p:sp>
+        <p:nvSpPr>
+          <p:cNvPr id="11" name="TextBox 10"/>
+          <p:cNvSpPr txBox="1"/>
+          <p:nvPr/>
+        </p:nvSpPr>
+        <p:spPr>
+          <a:xfrm>
+            <a:off x="6858000" y="6327648"/>
+            <a:ext cx="4572000" cy="320040"/>
+          </a:xfrm>
+          <a:prstGeom prst="rect">
+            <a:avLst/>
+          </a:prstGeom>
+          <a:noFill/>
+        </p:spPr>
+        <p:txBody>
+          <a:bodyPr wrap="none">
+            <a:spAutoFit/>
+          </a:bodyPr>
+          <a:lstStyle/>
+          <a:p>
+            <a:pPr algn="r">
+              <a:defRPr sz="950">
+                <a:solidFill>
+                  <a:srgbClr val="64748B"/>
+                </a:solidFill>
+              </a:defRPr>
+            </a:pPr>
+            <a:r>
+              <a:t>Dept. of CSE, VJCET</a:t>
             </a:r>
           </a:p>
         </p:txBody>
